--- a/docs/ahg-2026/kit/agent-file-principles.pptx
+++ b/docs/ahg-2026/kit/agent-file-principles.pptx
@@ -31,6 +31,8 @@
     <p:sldId id="279" r:id="rId30"/>
     <p:sldId id="280" r:id="rId31"/>
     <p:sldId id="281" r:id="rId32"/>
+    <p:sldId id="282" r:id="rId33"/>
+    <p:sldId id="283" r:id="rId34"/>
   </p:sldIdLst>
   <p:sldSz cx="12191695" cy="6858000" type="screen4x3"/>
   <p:notesSz cx="6858000" cy="9144000"/>
@@ -3248,7 +3250,19 @@
               <a:rPr sz="2000" b="0" lang="en-US">
                 <a:latin typeface="Arial"/>
               </a:rPr>
-              <a:t>The description is the first thing an assistant reads, and often the only thing, when it decides whether to use your agent. Say what the agent does, then start a second sentence with "Use when". For example: "Plans alternate formats for a course document from a checker's report. Use when a student needs a course document in large print, audio or braille."</a:t>
+              <a:t>The description is the first thing an assistant reads, and often the only thing, when it decides whether to use your agent. VS Code reads only the name and description of every skill up front; it reads the rest of the file when the skill is used, and a file in </a:t>
+            </a:r>
+            <a:r>
+              <a:rPr sz="2000" b="0" lang="en-US">
+                <a:latin typeface="Consolas"/>
+              </a:rPr>
+              <a:t>references</a:t>
+            </a:r>
+            <a:r>
+              <a:rPr sz="2000" b="0" lang="en-US">
+                <a:latin typeface="Arial"/>
+              </a:rPr>
+              <a:t> only when the instructions point to it. Say what the agent does, then start a second sentence with "Use when". For example: "Plans alternate formats for a course document from a checker's report. Use when a student needs a course document in large print, audio or braille."</a:t>
             </a:r>
           </a:p>
         </p:txBody>
@@ -4183,7 +4197,7 @@
               <a:rPr sz="2000" b="0" lang="en-US">
                 <a:latin typeface="Arial"/>
               </a:rPr>
-              <a:t>It follows the open Agent Skills format, the same one Accessibility Agents, GitHub Copilot, VS Code, Claude and ChatGPT read. The sources are at the end.</a:t>
+              <a:t>It follows the open Agent Skills format, the same one Accessibility Agents, GitHub Copilot, VS Code, Claude Code, Codex and Gemini CLI read. Any other assistant, ChatGPT in a browser included, takes the same file pasted in as its instructions. The sources are at the end.</a:t>
             </a:r>
           </a:p>
         </p:txBody>
@@ -4723,7 +4737,7 @@
         </p:nvGraphicFramePr>
         <p:xfrm>
           <a:off x="548640" y="1554480"/>
-          <a:ext cx="11064240" cy="1371600"/>
+          <a:ext cx="11064240" cy="1828800"/>
         </p:xfrm>
         <a:graphic>
           <a:graphicData uri="http://schemas.openxmlformats.org/drawingml/2006/table">
@@ -4870,7 +4884,7 @@
                         <a:rPr sz="1800" b="0" lang="en-US">
                           <a:latin typeface="Arial"/>
                         </a:rPr>
-                        <a:t>GitHub Copilot CLI, Claude Code, Codex, Gemini CLI</a:t>
+                        <a:t>GitHub Copilot CLI, Codex, Gemini CLI</a:t>
                       </a:r>
                     </a:p>
                   </a:txBody>
@@ -4898,6 +4912,71 @@
                           <a:latin typeface="Consolas"/>
                         </a:rPr>
                         <a:t>~/.agents/skills/&lt;name&gt;/SKILL.md</a:t>
+                      </a:r>
+                      <a:r>
+                        <a:rPr sz="1800" b="0" lang="en-US">
+                          <a:latin typeface="Arial"/>
+                        </a:rPr>
+                        <a:t> for every project</a:t>
+                      </a:r>
+                    </a:p>
+                  </a:txBody>
+                  <a:tcPr/>
+                </a:tc>
+                <a:tc>
+                  <a:txBody>
+                    <a:bodyPr wrap="square"/>
+                    <a:lstStyle/>
+                    <a:p>
+                      <a:r>
+                        <a:rPr sz="1800" b="0" lang="en-US">
+                          <a:latin typeface="Arial"/>
+                        </a:rPr>
+                        <a:t>It appears by name</a:t>
+                      </a:r>
+                    </a:p>
+                  </a:txBody>
+                  <a:tcPr/>
+                </a:tc>
+              </a:tr>
+              <a:tr h="457200">
+                <a:tc>
+                  <a:txBody>
+                    <a:bodyPr wrap="square"/>
+                    <a:lstStyle/>
+                    <a:p>
+                      <a:r>
+                        <a:rPr sz="1800" b="0" lang="en-US">
+                          <a:latin typeface="Arial"/>
+                        </a:rPr>
+                        <a:t>Claude Code</a:t>
+                      </a:r>
+                    </a:p>
+                  </a:txBody>
+                  <a:tcPr/>
+                </a:tc>
+                <a:tc>
+                  <a:txBody>
+                    <a:bodyPr wrap="square"/>
+                    <a:lstStyle/>
+                    <a:p>
+                      <a:r>
+                        <a:rPr sz="1800" b="0" lang="en-US">
+                          <a:latin typeface="Consolas"/>
+                        </a:rPr>
+                        <a:t>.claude/skills/&lt;name&gt;/SKILL.md</a:t>
+                      </a:r>
+                      <a:r>
+                        <a:rPr sz="1800" b="0" lang="en-US">
+                          <a:latin typeface="Arial"/>
+                        </a:rPr>
+                        <a:t>, or </a:t>
+                      </a:r>
+                      <a:r>
+                        <a:rPr sz="1800" b="0" lang="en-US">
+                          <a:latin typeface="Consolas"/>
+                        </a:rPr>
+                        <a:t>~/.claude/skills/&lt;name&gt;/SKILL.md</a:t>
                       </a:r>
                       <a:r>
                         <a:rPr sz="1800" b="0" lang="en-US">
@@ -5245,7 +5324,19 @@
               <a:rPr sz="2000" b="0" lang="en-US">
                 <a:latin typeface="Arial"/>
               </a:rPr>
-              <a:t>, do.</a:t>
+              <a:t>, do. VS Code and Claude Code read that field; it is not part of the open format, so other tools may ignore it. Never combine it with </a:t>
+            </a:r>
+            <a:r>
+              <a:rPr sz="2000" b="0" lang="en-US">
+                <a:latin typeface="Consolas"/>
+              </a:rPr>
+              <a:t>user-invocable: false</a:t>
+            </a:r>
+            <a:r>
+              <a:rPr sz="2000" b="0" lang="en-US">
+                <a:latin typeface="Arial"/>
+              </a:rPr>
+              <a:t>: VS Code then neither offers the skill as a command nor loads it on its own, so it never runs. The Accessibility Agents reference skills in this kit do combine them, on purpose: nobody runs a reference on its own, and its entry points open the file by path.</a:t>
             </a:r>
           </a:p>
         </p:txBody>
@@ -5292,7 +5383,7 @@
               <a:rPr sz="3600" b="1" lang="en-US">
                 <a:latin typeface="Arial"/>
               </a:rPr>
-              <a:t>Sources</a:t>
+              <a:t>Sources (1 of 3)</a:t>
             </a:r>
           </a:p>
         </p:txBody>
@@ -5316,6 +5407,20 @@
         <p:txBody>
           <a:bodyPr wrap="square"/>
           <a:lstStyle/>
+          <a:p>
+            <a:pPr marL="0" indent="0">
+              <a:spcAft>
+                <a:spcPts val="600"/>
+              </a:spcAft>
+              <a:buNone/>
+            </a:pPr>
+            <a:r>
+              <a:rPr sz="2000" b="0" lang="en-US">
+                <a:latin typeface="Arial"/>
+              </a:rPr>
+              <a:t>Checked on 29 October 2026.</a:t>
+            </a:r>
+          </a:p>
           <a:p>
             <a:pPr lvl="1">
               <a:spcAft>
@@ -5333,7 +5438,43 @@
               <a:rPr sz="2000" b="0" lang="en-US">
                 <a:latin typeface="Arial"/>
               </a:rPr>
-              <a:t>: the file format, the header fields and their limits, and the advice to keep a file short and put the rest in </a:t>
+              <a:t>: the file format, the header fields and their limits (</a:t>
+            </a:r>
+            <a:r>
+              <a:rPr sz="2000" b="0" lang="en-US">
+                <a:latin typeface="Consolas"/>
+              </a:rPr>
+              <a:t>name</a:t>
+            </a:r>
+            <a:r>
+              <a:rPr sz="2000" b="0" lang="en-US">
+                <a:latin typeface="Arial"/>
+              </a:rPr>
+              <a:t> at most 64 characters and matching its folder, </a:t>
+            </a:r>
+            <a:r>
+              <a:rPr sz="2000" b="0" lang="en-US">
+                <a:latin typeface="Consolas"/>
+              </a:rPr>
+              <a:t>description</a:t>
+            </a:r>
+            <a:r>
+              <a:rPr sz="2000" b="0" lang="en-US">
+                <a:latin typeface="Arial"/>
+              </a:rPr>
+              <a:t> at most 1,024), and the advice to keep </a:t>
+            </a:r>
+            <a:r>
+              <a:rPr sz="2000" b="0" lang="en-US">
+                <a:latin typeface="Consolas"/>
+              </a:rPr>
+              <a:t>SKILL.md</a:t>
+            </a:r>
+            <a:r>
+              <a:rPr sz="2000" b="0" lang="en-US">
+                <a:latin typeface="Arial"/>
+              </a:rPr>
+              <a:t> under 500 lines and put the rest in </a:t>
             </a:r>
             <a:r>
               <a:rPr sz="2000" b="0" lang="en-US">
@@ -5359,13 +5500,97 @@
                 <a:latin typeface="Arial"/>
                 <a:hlinkClick r:id="rId3"/>
               </a:rPr>
-              <a:t>Accessibility Agents: Agent Skills standard</a:t>
-            </a:r>
-            <a:r>
-              <a:rPr sz="2000" b="0" lang="en-US">
-                <a:latin typeface="Arial"/>
-              </a:rPr>
-              <a:t>: how the project applies the format, its size limits, and where each tool finds skills.</a:t>
+              <a:t>VS Code: use Agent Skills</a:t>
+            </a:r>
+            <a:r>
+              <a:rPr sz="2000" b="0" lang="en-US">
+                <a:latin typeface="Arial"/>
+              </a:rPr>
+              <a:t>: the folders VS Code searches (</a:t>
+            </a:r>
+            <a:r>
+              <a:rPr sz="2000" b="0" lang="en-US">
+                <a:latin typeface="Consolas"/>
+              </a:rPr>
+              <a:t>.github/skills</a:t>
+            </a:r>
+            <a:r>
+              <a:rPr sz="2000" b="0" lang="en-US">
+                <a:latin typeface="Arial"/>
+              </a:rPr>
+              <a:t>, </a:t>
+            </a:r>
+            <a:r>
+              <a:rPr sz="2000" b="0" lang="en-US">
+                <a:latin typeface="Consolas"/>
+              </a:rPr>
+              <a:t>.claude/skills</a:t>
+            </a:r>
+            <a:r>
+              <a:rPr sz="2000" b="0" lang="en-US">
+                <a:latin typeface="Arial"/>
+              </a:rPr>
+              <a:t>, </a:t>
+            </a:r>
+            <a:r>
+              <a:rPr sz="2000" b="0" lang="en-US">
+                <a:latin typeface="Consolas"/>
+              </a:rPr>
+              <a:t>.agents/skills</a:t>
+            </a:r>
+            <a:r>
+              <a:rPr sz="2000" b="0" lang="en-US">
+                <a:latin typeface="Arial"/>
+              </a:rPr>
+              <a:t>, and </a:t>
+            </a:r>
+            <a:r>
+              <a:rPr sz="2000" b="0" lang="en-US">
+                <a:latin typeface="Consolas"/>
+              </a:rPr>
+              <a:t>~/.copilot/skills</a:t>
+            </a:r>
+            <a:r>
+              <a:rPr sz="2000" b="0" lang="en-US">
+                <a:latin typeface="Arial"/>
+              </a:rPr>
+              <a:t> for every project), how a skill becomes a </a:t>
+            </a:r>
+            <a:r>
+              <a:rPr sz="2000" b="0" lang="en-US">
+                <a:latin typeface="Consolas"/>
+              </a:rPr>
+              <a:t>/</a:t>
+            </a:r>
+            <a:r>
+              <a:rPr sz="2000" b="0" lang="en-US">
+                <a:latin typeface="Arial"/>
+              </a:rPr>
+              <a:t> command, </a:t>
+            </a:r>
+            <a:r>
+              <a:rPr sz="2000" b="0" lang="en-US">
+                <a:latin typeface="Consolas"/>
+              </a:rPr>
+              <a:t>user-invocable</a:t>
+            </a:r>
+            <a:r>
+              <a:rPr sz="2000" b="0" lang="en-US">
+                <a:latin typeface="Arial"/>
+              </a:rPr>
+              <a:t> and </a:t>
+            </a:r>
+            <a:r>
+              <a:rPr sz="2000" b="0" lang="en-US">
+                <a:latin typeface="Consolas"/>
+              </a:rPr>
+              <a:t>disable-model-invocation</a:t>
+            </a:r>
+            <a:r>
+              <a:rPr sz="2000" b="0" lang="en-US">
+                <a:latin typeface="Arial"/>
+              </a:rPr>
+              <a:t>, and the three steps in which a skill is loaded.</a:t>
             </a:r>
           </a:p>
           <a:p>
@@ -5379,15 +5604,83 @@
                 <a:latin typeface="Arial"/>
                 <a:hlinkClick r:id="rId4"/>
               </a:rPr>
-              <a:t>Accessibility Agents: citation policy</a:t>
-            </a:r>
-            <a:r>
-              <a:rPr sz="2000" b="0" lang="en-US">
-                <a:latin typeface="Arial"/>
-              </a:rPr>
-              <a:t>: why every finding cites a source.</a:t>
-            </a:r>
-          </a:p>
+              <a:t>GitHub Docs: about agent skills</a:t>
+            </a:r>
+            <a:r>
+              <a:rPr sz="2000" b="0" lang="en-US">
+                <a:latin typeface="Arial"/>
+              </a:rPr>
+              <a:t>: where GitHub Copilot and the Copilot CLI find skills.</a:t>
+            </a:r>
+          </a:p>
+        </p:txBody>
+      </p:sp>
+    </p:spTree>
+  </p:cSld>
+  <p:clrMapOvr>
+    <a:masterClrMapping/>
+  </p:clrMapOvr>
+</p:sld>
+</file>
+
+<file path=ppt/slides/slide27.xml><?xml version="1.0" encoding="utf-8"?>
+<p:sld xmlns:a="http://schemas.openxmlformats.org/drawingml/2006/main" xmlns:p="http://schemas.openxmlformats.org/presentationml/2006/main" xmlns:r="http://schemas.openxmlformats.org/officeDocument/2006/relationships">
+  <p:cSld>
+    <p:spTree>
+      <p:nvGrpSpPr>
+        <p:cNvPr id="1" name=""/>
+        <p:cNvGrpSpPr/>
+        <p:nvPr/>
+      </p:nvGrpSpPr>
+      <p:grpSpPr/>
+      <p:sp>
+        <p:nvSpPr>
+          <p:cNvPr id="2" name="Title 1"/>
+          <p:cNvSpPr>
+            <a:spLocks noGrp="1"/>
+          </p:cNvSpPr>
+          <p:nvPr>
+            <p:ph type="title"/>
+          </p:nvPr>
+        </p:nvSpPr>
+        <p:spPr>
+          <a:xfrm>
+            <a:off x="548640" y="365760"/>
+            <a:ext cx="11064240" cy="1097280"/>
+          </a:xfrm>
+        </p:spPr>
+        <p:txBody>
+          <a:bodyPr wrap="square"/>
+          <a:lstStyle/>
+          <a:p>
+            <a:r>
+              <a:rPr sz="3600" b="1" lang="en-US">
+                <a:latin typeface="Arial"/>
+              </a:rPr>
+              <a:t>Sources (2 of 3)</a:t>
+            </a:r>
+          </a:p>
+        </p:txBody>
+      </p:sp>
+      <p:sp>
+        <p:nvSpPr>
+          <p:cNvPr id="3" name="Content Placeholder 2"/>
+          <p:cNvSpPr>
+            <a:spLocks noGrp="1"/>
+          </p:cNvSpPr>
+          <p:nvPr>
+            <p:ph idx="1"/>
+          </p:nvPr>
+        </p:nvSpPr>
+        <p:spPr>
+          <a:xfrm>
+            <a:off x="548640" y="1554480"/>
+            <a:ext cx="11064240" cy="4937760"/>
+          </a:xfrm>
+        </p:spPr>
+        <p:txBody>
+          <a:bodyPr wrap="square"/>
+          <a:lstStyle/>
           <a:p>
             <a:pPr lvl="1">
               <a:spcAft>
@@ -5397,15 +5690,41 @@
             <a:r>
               <a:rPr sz="2000" b="0" lang="en-US">
                 <a:latin typeface="Arial"/>
-                <a:hlinkClick r:id="rId5"/>
-              </a:rPr>
-              <a:t>VS Code: agent skills</a:t>
-            </a:r>
-            <a:r>
-              <a:rPr sz="2000" b="0" lang="en-US">
-                <a:latin typeface="Arial"/>
-              </a:rPr>
-              <a:t>: where VS Code finds skills, and how they become commands.</a:t>
+                <a:hlinkClick r:id="rId2"/>
+              </a:rPr>
+              <a:t>Claude Code: skills</a:t>
+            </a:r>
+            <a:r>
+              <a:rPr sz="2000" b="0" lang="en-US">
+                <a:latin typeface="Arial"/>
+              </a:rPr>
+              <a:t>, </a:t>
+            </a:r>
+            <a:r>
+              <a:rPr sz="2000" b="0" lang="en-US">
+                <a:latin typeface="Arial"/>
+                <a:hlinkClick r:id="rId3"/>
+              </a:rPr>
+              <a:t>Codex: build skills</a:t>
+            </a:r>
+            <a:r>
+              <a:rPr sz="2000" b="0" lang="en-US">
+                <a:latin typeface="Arial"/>
+              </a:rPr>
+              <a:t> and </a:t>
+            </a:r>
+            <a:r>
+              <a:rPr sz="2000" b="0" lang="en-US">
+                <a:latin typeface="Arial"/>
+                <a:hlinkClick r:id="rId4"/>
+              </a:rPr>
+              <a:t>Gemini CLI: skills</a:t>
+            </a:r>
+            <a:r>
+              <a:rPr sz="2000" b="0" lang="en-US">
+                <a:latin typeface="Arial"/>
+              </a:rPr>
+              <a:t>: where each of those tools finds skills.</a:t>
             </a:r>
           </a:p>
           <a:p>
@@ -5417,20 +5736,60 @@
             <a:r>
               <a:rPr sz="2000" b="0" lang="en-US">
                 <a:latin typeface="Arial"/>
+                <a:hlinkClick r:id="rId5"/>
+              </a:rPr>
+              <a:t>Accessibility Agents: Agent Skills standard</a:t>
+            </a:r>
+            <a:r>
+              <a:rPr sz="2000" b="0" lang="en-US">
+                <a:latin typeface="Arial"/>
+              </a:rPr>
+              <a:t>: how the project applies the format, its size limits, and where each tool finds skills.</a:t>
+            </a:r>
+          </a:p>
+          <a:p>
+            <a:pPr lvl="1">
+              <a:spcAft>
+                <a:spcPts val="600"/>
+              </a:spcAft>
+            </a:pPr>
+            <a:r>
+              <a:rPr sz="2000" b="0" lang="en-US">
+                <a:latin typeface="Arial"/>
                 <a:hlinkClick r:id="rId6"/>
               </a:rPr>
+              <a:t>Accessibility Agents: citation policy</a:t>
+            </a:r>
+            <a:r>
+              <a:rPr sz="2000" b="0" lang="en-US">
+                <a:latin typeface="Arial"/>
+              </a:rPr>
+              <a:t>: why every finding cites a source.</a:t>
+            </a:r>
+          </a:p>
+          <a:p>
+            <a:pPr lvl="1">
+              <a:spcAft>
+                <a:spcPts val="600"/>
+              </a:spcAft>
+            </a:pPr>
+            <a:r>
+              <a:rPr sz="2000" b="0" lang="en-US">
+                <a:latin typeface="Arial"/>
+                <a:hlinkClick r:id="rId7"/>
+              </a:rPr>
               <a:t>WCAG 2.2</a:t>
             </a:r>
             <a:r>
               <a:rPr sz="2000" b="0" lang="en-US">
                 <a:latin typeface="Arial"/>
               </a:rPr>
-              <a:t> and </a:t>
-            </a:r>
-            <a:r>
-              <a:rPr sz="2000" b="0" lang="en-US">
-                <a:latin typeface="Arial"/>
-                <a:hlinkClick r:id="rId7"/>
+              <a:t>, a W3C Recommendation (first published 5 October 2023, current edition 12 December 2024), and </a:t>
+            </a:r>
+            <a:r>
+              <a:rPr sz="2000" b="0" lang="en-US">
+                <a:latin typeface="Arial"/>
+                <a:hlinkClick r:id="rId8"/>
               </a:rPr>
               <a:t>Understanding WCAG 2.2</a:t>
             </a:r>
@@ -5438,7 +5797,108 @@
               <a:rPr sz="2000" b="0" lang="en-US">
                 <a:latin typeface="Arial"/>
               </a:rPr>
-              <a:t>: the standard every workshop agent cites.</a:t>
+              <a:t>: the standard every workshop agent cites. </a:t>
+            </a:r>
+            <a:r>
+              <a:rPr sz="2000" b="0" lang="en-US">
+                <a:latin typeface="Arial"/>
+                <a:hlinkClick r:id="rId9"/>
+              </a:rPr>
+              <a:t>WCAG 3.0</a:t>
+            </a:r>
+            <a:r>
+              <a:rPr sz="2000" b="0" lang="en-US">
+                <a:latin typeface="Arial"/>
+              </a:rPr>
+              <a:t> is a Working Draft, not a standard; no agent should cite it as one.</a:t>
+            </a:r>
+          </a:p>
+        </p:txBody>
+      </p:sp>
+    </p:spTree>
+  </p:cSld>
+  <p:clrMapOvr>
+    <a:masterClrMapping/>
+  </p:clrMapOvr>
+</p:sld>
+</file>
+
+<file path=ppt/slides/slide28.xml><?xml version="1.0" encoding="utf-8"?>
+<p:sld xmlns:a="http://schemas.openxmlformats.org/drawingml/2006/main" xmlns:p="http://schemas.openxmlformats.org/presentationml/2006/main" xmlns:r="http://schemas.openxmlformats.org/officeDocument/2006/relationships">
+  <p:cSld>
+    <p:spTree>
+      <p:nvGrpSpPr>
+        <p:cNvPr id="1" name=""/>
+        <p:cNvGrpSpPr/>
+        <p:nvPr/>
+      </p:nvGrpSpPr>
+      <p:grpSpPr/>
+      <p:sp>
+        <p:nvSpPr>
+          <p:cNvPr id="2" name="Title 1"/>
+          <p:cNvSpPr>
+            <a:spLocks noGrp="1"/>
+          </p:cNvSpPr>
+          <p:nvPr>
+            <p:ph type="title"/>
+          </p:nvPr>
+        </p:nvSpPr>
+        <p:spPr>
+          <a:xfrm>
+            <a:off x="548640" y="365760"/>
+            <a:ext cx="11064240" cy="1097280"/>
+          </a:xfrm>
+        </p:spPr>
+        <p:txBody>
+          <a:bodyPr wrap="square"/>
+          <a:lstStyle/>
+          <a:p>
+            <a:r>
+              <a:rPr sz="3600" b="1" lang="en-US">
+                <a:latin typeface="Arial"/>
+              </a:rPr>
+              <a:t>Sources (3 of 3)</a:t>
+            </a:r>
+          </a:p>
+        </p:txBody>
+      </p:sp>
+      <p:sp>
+        <p:nvSpPr>
+          <p:cNvPr id="3" name="Content Placeholder 2"/>
+          <p:cNvSpPr>
+            <a:spLocks noGrp="1"/>
+          </p:cNvSpPr>
+          <p:nvPr>
+            <p:ph idx="1"/>
+          </p:nvPr>
+        </p:nvSpPr>
+        <p:spPr>
+          <a:xfrm>
+            <a:off x="548640" y="1554480"/>
+            <a:ext cx="11064240" cy="4937760"/>
+          </a:xfrm>
+        </p:spPr>
+        <p:txBody>
+          <a:bodyPr wrap="square"/>
+          <a:lstStyle/>
+          <a:p>
+            <a:pPr lvl="1">
+              <a:spcAft>
+                <a:spcPts val="600"/>
+              </a:spcAft>
+            </a:pPr>
+            <a:r>
+              <a:rPr sz="2000" b="0" lang="en-US">
+                <a:latin typeface="Arial"/>
+                <a:hlinkClick r:id="rId2"/>
+              </a:rPr>
+              <a:t>ADA Title II web rule</a:t>
+            </a:r>
+            <a:r>
+              <a:rPr sz="2000" b="0" lang="en-US">
+                <a:latin typeface="Arial"/>
+              </a:rPr>
+              <a:t>: public colleges and universities must meet WCAG 2.1 AA. An interim final rule of 20 April 2026 moved the dates to 26 April 2027 for entities of 50,000 people or more and 26 April 2028 for smaller ones.</a:t>
             </a:r>
           </a:p>
         </p:txBody>
